--- a/docs/presentacion_comite_riesgos.pptx
+++ b/docs/presentacion_comite_riesgos.pptx
@@ -5104,7 +5104,7 @@
               </a:defRPr>
             </a:pPr>
             <a:r>
-              <a:t>Por que es defendible</a:t>
+              <a:t>Trazabilidad de la decision</a:t>
             </a:r>
           </a:p>
         </p:txBody>
@@ -5182,7 +5182,7 @@
               </a:defRPr>
             </a:pPr>
             <a:r>
-              <a:t>LLM local no decide solo: extrae accion.</a:t>
+              <a:t>El LLM clasifica la respuesta de Agent B.</a:t>
             </a:r>
           </a:p>
         </p:txBody>
@@ -5260,7 +5260,7 @@
               </a:defRPr>
             </a:pPr>
             <a:r>
-              <a:t>RAG aporta politicas y fuentes.</a:t>
+              <a:t>El RAG recupera la politica usada como evidencia.</a:t>
             </a:r>
           </a:p>
         </p:txBody>
@@ -5338,7 +5338,7 @@
               </a:defRPr>
             </a:pPr>
             <a:r>
-              <a:t>Reglas duras calculan conformidad.</a:t>
+              <a:t>Las reglas validan limites, abuso y SARLAFT/AML.</a:t>
             </a:r>
           </a:p>
         </p:txBody>
@@ -5416,7 +5416,7 @@
               </a:defRPr>
             </a:pPr>
             <a:r>
-              <a:t>Reporte JSON listo para auditoria.</a:t>
+              <a:t>Cada caso deja estado, score, razon y fuentes.</a:t>
             </a:r>
           </a:p>
         </p:txBody>
@@ -7066,7 +7066,7 @@
               </a:defRPr>
             </a:pPr>
             <a:r>
-              <a:t>Lectura ejecutiva: el agente conserva velocidad en casos seguros y detiene desviaciones de limite, abuso o cumplimiento.</a:t>
+              <a:t>Lectura ejecutiva: los casos 1 y 2 pueden continuar; los casos 3 y 4 se frenan antes de generar riesgo financiero o regulatorio.</a:t>
             </a:r>
           </a:p>
         </p:txBody>
